--- a/docs/TDMA_Planner_Presentation.pptx
+++ b/docs/TDMA_Planner_Presentation.pptx
@@ -4445,7 +4445,7 @@
                 </a:solidFill>
                 <a:latin typeface="Calibri"/>
               </a:rPr>
-              <a:t>Candidate  |  Wireless Protocol Development Internship task  |  Vaan Megam Networks</a:t>
+              <a:t>Keshav Singla  |  Wireless Protocol Development Internship task  |  Vaan Megam Networks</a:t>
             </a:r>
           </a:p>
         </p:txBody>
